--- a/livro_ia_educacao/saida/pptx/Cap09_slides.pptx
+++ b/livro_ia_educacao/saida/pptx/Cap09_slides.pptx
@@ -11536,11 +11536,11 @@
         <p:spPr>
           <a:xfrm>
             <a:off x="548640" y="1417320"/>
-            <a:ext cx="11064240" cy="762000"/>
+            <a:ext cx="11064240" cy="682752"/>
           </a:xfrm>
           <a:prstGeom prst="roundRect">
             <a:avLst>
-              <a:gd name="adj" fmla="val 14400"/>
+              <a:gd name="adj" fmla="val 16071"/>
             </a:avLst>
           </a:prstGeom>
           <a:solidFill>
@@ -11567,7 +11567,7 @@
         <p:spPr>
           <a:xfrm>
             <a:off x="731520" y="1417320"/>
-            <a:ext cx="548640" cy="762000"/>
+            <a:ext cx="548640" cy="682752"/>
           </a:xfrm>
           <a:prstGeom prst="rect">
             <a:avLst/>
@@ -11603,7 +11603,7 @@
         <p:spPr>
           <a:xfrm>
             <a:off x="1463040" y="1417320"/>
-            <a:ext cx="9966960" cy="762000"/>
+            <a:ext cx="9966960" cy="682752"/>
           </a:xfrm>
           <a:prstGeom prst="rect">
             <a:avLst/>
@@ -11638,12 +11638,12 @@
         </p:nvSpPr>
         <p:spPr>
           <a:xfrm>
-            <a:off x="548640" y="2289048"/>
-            <a:ext cx="11064240" cy="762000"/>
+            <a:off x="548640" y="2209800"/>
+            <a:ext cx="11064240" cy="682752"/>
           </a:xfrm>
           <a:prstGeom prst="roundRect">
             <a:avLst>
-              <a:gd name="adj" fmla="val 14400"/>
+              <a:gd name="adj" fmla="val 16071"/>
             </a:avLst>
           </a:prstGeom>
           <a:solidFill>
@@ -11669,8 +11669,8 @@
         </p:nvSpPr>
         <p:spPr>
           <a:xfrm>
-            <a:off x="731520" y="2289048"/>
-            <a:ext cx="548640" cy="762000"/>
+            <a:off x="731520" y="2209800"/>
+            <a:ext cx="548640" cy="682752"/>
           </a:xfrm>
           <a:prstGeom prst="rect">
             <a:avLst/>
@@ -11705,8 +11705,8 @@
         </p:nvSpPr>
         <p:spPr>
           <a:xfrm>
-            <a:off x="1463040" y="2289048"/>
-            <a:ext cx="9966960" cy="762000"/>
+            <a:off x="1463040" y="2209800"/>
+            <a:ext cx="9966960" cy="682752"/>
           </a:xfrm>
           <a:prstGeom prst="rect">
             <a:avLst/>
@@ -11741,12 +11741,12 @@
         </p:nvSpPr>
         <p:spPr>
           <a:xfrm>
-            <a:off x="548640" y="3160776"/>
-            <a:ext cx="11064240" cy="762000"/>
+            <a:off x="548640" y="3002280"/>
+            <a:ext cx="11064240" cy="682752"/>
           </a:xfrm>
           <a:prstGeom prst="roundRect">
             <a:avLst>
-              <a:gd name="adj" fmla="val 14400"/>
+              <a:gd name="adj" fmla="val 16071"/>
             </a:avLst>
           </a:prstGeom>
           <a:solidFill>
@@ -11772,8 +11772,8 @@
         </p:nvSpPr>
         <p:spPr>
           <a:xfrm>
-            <a:off x="731520" y="3160776"/>
-            <a:ext cx="548640" cy="762000"/>
+            <a:off x="731520" y="3002280"/>
+            <a:ext cx="548640" cy="682752"/>
           </a:xfrm>
           <a:prstGeom prst="rect">
             <a:avLst/>
@@ -11808,8 +11808,8 @@
         </p:nvSpPr>
         <p:spPr>
           <a:xfrm>
-            <a:off x="1463040" y="3160776"/>
-            <a:ext cx="9966960" cy="762000"/>
+            <a:off x="1463040" y="3002280"/>
+            <a:ext cx="9966960" cy="682752"/>
           </a:xfrm>
           <a:prstGeom prst="rect">
             <a:avLst/>
@@ -11844,12 +11844,12 @@
         </p:nvSpPr>
         <p:spPr>
           <a:xfrm>
-            <a:off x="548640" y="4032504"/>
-            <a:ext cx="11064240" cy="762000"/>
+            <a:off x="548640" y="3794760"/>
+            <a:ext cx="11064240" cy="682752"/>
           </a:xfrm>
           <a:prstGeom prst="roundRect">
             <a:avLst>
-              <a:gd name="adj" fmla="val 14400"/>
+              <a:gd name="adj" fmla="val 16071"/>
             </a:avLst>
           </a:prstGeom>
           <a:solidFill>
@@ -11875,8 +11875,8 @@
         </p:nvSpPr>
         <p:spPr>
           <a:xfrm>
-            <a:off x="731520" y="4032504"/>
-            <a:ext cx="548640" cy="762000"/>
+            <a:off x="731520" y="3794760"/>
+            <a:ext cx="548640" cy="682752"/>
           </a:xfrm>
           <a:prstGeom prst="rect">
             <a:avLst/>
@@ -11911,8 +11911,8 @@
         </p:nvSpPr>
         <p:spPr>
           <a:xfrm>
-            <a:off x="1463040" y="4032504"/>
-            <a:ext cx="9966960" cy="762000"/>
+            <a:off x="1463040" y="3794760"/>
+            <a:ext cx="9966960" cy="682752"/>
           </a:xfrm>
           <a:prstGeom prst="rect">
             <a:avLst/>
@@ -11947,12 +11947,12 @@
         </p:nvSpPr>
         <p:spPr>
           <a:xfrm>
-            <a:off x="548640" y="4904232"/>
-            <a:ext cx="11064240" cy="762000"/>
+            <a:off x="548640" y="4587240"/>
+            <a:ext cx="11064240" cy="682752"/>
           </a:xfrm>
           <a:prstGeom prst="roundRect">
             <a:avLst>
-              <a:gd name="adj" fmla="val 14400"/>
+              <a:gd name="adj" fmla="val 16071"/>
             </a:avLst>
           </a:prstGeom>
           <a:solidFill>
@@ -11978,8 +11978,8 @@
         </p:nvSpPr>
         <p:spPr>
           <a:xfrm>
-            <a:off x="731520" y="4904232"/>
-            <a:ext cx="548640" cy="762000"/>
+            <a:off x="731520" y="4587240"/>
+            <a:ext cx="548640" cy="682752"/>
           </a:xfrm>
           <a:prstGeom prst="rect">
             <a:avLst/>
@@ -12014,8 +12014,8 @@
         </p:nvSpPr>
         <p:spPr>
           <a:xfrm>
-            <a:off x="1463040" y="4904232"/>
-            <a:ext cx="9966960" cy="762000"/>
+            <a:off x="1463040" y="4587240"/>
+            <a:ext cx="9966960" cy="682752"/>
           </a:xfrm>
           <a:prstGeom prst="rect">
             <a:avLst/>
@@ -12050,12 +12050,12 @@
         </p:nvSpPr>
         <p:spPr>
           <a:xfrm>
-            <a:off x="548640" y="5775960"/>
-            <a:ext cx="11064240" cy="762000"/>
+            <a:off x="548640" y="5379720"/>
+            <a:ext cx="11064240" cy="682752"/>
           </a:xfrm>
           <a:prstGeom prst="roundRect">
             <a:avLst>
-              <a:gd name="adj" fmla="val 14400"/>
+              <a:gd name="adj" fmla="val 16071"/>
             </a:avLst>
           </a:prstGeom>
           <a:solidFill>
@@ -12081,8 +12081,8 @@
         </p:nvSpPr>
         <p:spPr>
           <a:xfrm>
-            <a:off x="731520" y="5775960"/>
-            <a:ext cx="548640" cy="762000"/>
+            <a:off x="731520" y="5379720"/>
+            <a:ext cx="548640" cy="682752"/>
           </a:xfrm>
           <a:prstGeom prst="rect">
             <a:avLst/>
@@ -12117,8 +12117,8 @@
         </p:nvSpPr>
         <p:spPr>
           <a:xfrm>
-            <a:off x="1463040" y="5775960"/>
-            <a:ext cx="9966960" cy="762000"/>
+            <a:off x="1463040" y="5379720"/>
+            <a:ext cx="9966960" cy="682752"/>
           </a:xfrm>
           <a:prstGeom prst="rect">
             <a:avLst/>
